--- a/classes/parte-9-forense-digital-y-respuesta-a-incidentes/208-forense-de-red/clase-208-presentacion.pptx
+++ b/classes/parte-9-forense-digital-y-respuesta-a-incidentes/208-forense-de-red/clase-208-presentacion.pptx
@@ -17,6 +17,11 @@
     <p:sldId id="265" r:id="rId16"/>
     <p:sldId id="266" r:id="rId17"/>
     <p:sldId id="267" r:id="rId18"/>
+    <p:sldId id="268" r:id="rId19"/>
+    <p:sldId id="269" r:id="rId20"/>
+    <p:sldId id="270" r:id="rId21"/>
+    <p:sldId id="271" r:id="rId22"/>
+    <p:sldId id="272" r:id="rId23"/>
   </p:sldIdLst>
   <p:sldSz cx="9144000" cy="6858000" type="screen4x3"/>
   <p:notesSz cx="6858000" cy="9144000"/>
@@ -3198,7 +3203,7 @@
                   <a:srgbClr val="0B3D2E"/>
                 </a:solidFill>
               </a:rPr>
-              <a:t>⚠️ Errores comunes</a:t>
+              <a:t>🧰 Herramientas y preparación</a:t>
             </a:r>
           </a:p>
         </p:txBody>
@@ -3236,67 +3241,37 @@
                   <a:srgbClr val="22282E"/>
                 </a:solidFill>
               </a:rPr>
-              <a:t>•  No ves contenido, solo cifrado — Es TLS. Analiza metadatos (SNI, JA3, tamaños) en vez del claro.</a:t>
-            </a:r>
-          </a:p>
-          <a:p>
-            <a:pPr>
-              <a:spcAft>
-                <a:spcPts val="600"/>
-              </a:spcAft>
-            </a:pPr>
-            <a:r>
-              <a:rPr sz="1500">
-                <a:solidFill>
-                  <a:srgbClr val="22282E"/>
-                </a:solidFill>
-              </a:rPr>
-              <a:t>•  Wireshark se cuelga con PCAP grande — Demasiado en memoria. Filtra con tshark o divide con editcap.</a:t>
-            </a:r>
-          </a:p>
-          <a:p>
-            <a:pPr>
-              <a:spcAft>
-                <a:spcPts val="600"/>
-              </a:spcAft>
-            </a:pPr>
-            <a:r>
-              <a:rPr sz="1500">
-                <a:solidFill>
-                  <a:srgbClr val="22282E"/>
-                </a:solidFill>
-              </a:rPr>
-              <a:t>•  No detectas el beacon — Jitter aleatorio del malware. Analiza distribución de intervalos, no valores exactos.</a:t>
-            </a:r>
-          </a:p>
-          <a:p>
-            <a:pPr>
-              <a:spcAft>
-                <a:spcPts val="600"/>
-              </a:spcAft>
-            </a:pPr>
-            <a:r>
-              <a:rPr sz="1500">
-                <a:solidFill>
-                  <a:srgbClr val="22282E"/>
-                </a:solidFill>
-              </a:rPr>
-              <a:t>•  Export Objects vacío — El archivo va fragmentado o cifrado. Prueba NetworkMiner o reensamblado manual.</a:t>
-            </a:r>
-          </a:p>
-          <a:p>
-            <a:pPr>
-              <a:spcAft>
-                <a:spcPts val="600"/>
-              </a:spcAft>
-            </a:pPr>
-            <a:r>
-              <a:rPr sz="1500">
-                <a:solidFill>
-                  <a:srgbClr val="22282E"/>
-                </a:solidFill>
-              </a:rPr>
-              <a:t>•  Zeek no genera logs — Ruta o versión incorrecta. Verifica instalación y permisos de escritura.</a:t>
+              <a:t>•  Captura: tcpdump, dumpcap.</a:t>
+            </a:r>
+          </a:p>
+          <a:p>
+            <a:pPr>
+              <a:spcAft>
+                <a:spcPts val="600"/>
+              </a:spcAft>
+            </a:pPr>
+            <a:r>
+              <a:rPr sz="1500">
+                <a:solidFill>
+                  <a:srgbClr val="22282E"/>
+                </a:solidFill>
+              </a:rPr>
+              <a:t>•  Análisis: Wireshark y tshark, Zeek, NetworkMiner (extracción de archivos), RITA (detección de beaconing sobre logs de Zeek).</a:t>
+            </a:r>
+          </a:p>
+          <a:p>
+            <a:pPr>
+              <a:spcAft>
+                <a:spcPts val="600"/>
+              </a:spcAft>
+            </a:pPr>
+            <a:r>
+              <a:rPr sz="1500">
+                <a:solidFill>
+                  <a:srgbClr val="22282E"/>
+                </a:solidFill>
+              </a:rPr>
+              <a:t>•  Muestras: usa PCAPs propios o datasets públicos de práctica (por ejemplo, capturas de Malware-Traffic-Analysis con fines educativos). Analiza malware solo en laboratorio aislado.</a:t>
             </a:r>
           </a:p>
         </p:txBody>
@@ -3347,7 +3322,7 @@
                   <a:srgbClr val="0B3D2E"/>
                 </a:solidFill>
               </a:rPr>
-              <a:t>❓ Preguntas frecuentes</a:t>
+              <a:t>🧪 Laboratorio guiado</a:t>
             </a:r>
           </a:p>
         </p:txBody>
@@ -3385,97 +3360,97 @@
                   <a:srgbClr val="22282E"/>
                 </a:solidFill>
               </a:rPr>
-              <a:t>•  ❓ ¿PCAP o NetFlow?</a:t>
-            </a:r>
-          </a:p>
-          <a:p>
-            <a:pPr>
-              <a:spcAft>
-                <a:spcPts val="600"/>
-              </a:spcAft>
-            </a:pPr>
-            <a:r>
-              <a:rPr sz="1500">
-                <a:solidFill>
-                  <a:srgbClr val="22282E"/>
-                </a:solidFill>
-              </a:rPr>
-              <a:t>•  PCAP da detalle total pero no escala; NetFlow escala a toda la red pero sin contenido. En un caso serio usas ambos.</a:t>
-            </a:r>
-          </a:p>
-          <a:p>
-            <a:pPr>
-              <a:spcAft>
-                <a:spcPts val="600"/>
-              </a:spcAft>
-            </a:pPr>
-            <a:r>
-              <a:rPr sz="1500">
-                <a:solidFill>
-                  <a:srgbClr val="22282E"/>
-                </a:solidFill>
-              </a:rPr>
-              <a:t>•  ❓ ¿Puedo descifrar TLS?</a:t>
-            </a:r>
-          </a:p>
-          <a:p>
-            <a:pPr>
-              <a:spcAft>
-                <a:spcPts val="600"/>
-              </a:spcAft>
-            </a:pPr>
-            <a:r>
-              <a:rPr sz="1500">
-                <a:solidFill>
-                  <a:srgbClr val="22282E"/>
-                </a:solidFill>
-              </a:rPr>
-              <a:t>•  Solo si tienes las claves o el SSLKEYLOGFILE. Sin ellas, trabajas con metadatos: SNI, certificados, JA3, tamaños y tiempos.</a:t>
-            </a:r>
-          </a:p>
-          <a:p>
-            <a:pPr>
-              <a:spcAft>
-                <a:spcPts val="600"/>
-              </a:spcAft>
-            </a:pPr>
-            <a:r>
-              <a:rPr sz="1500">
-                <a:solidFill>
-                  <a:srgbClr val="22282E"/>
-                </a:solidFill>
-              </a:rPr>
-              <a:t>•  ❓ ¿Cómo se ve un túnel DNS?</a:t>
-            </a:r>
-          </a:p>
-          <a:p>
-            <a:pPr>
-              <a:spcAft>
-                <a:spcPts val="600"/>
-              </a:spcAft>
-            </a:pPr>
-            <a:r>
-              <a:rPr sz="1500">
-                <a:solidFill>
-                  <a:srgbClr val="22282E"/>
-                </a:solidFill>
-              </a:rPr>
-              <a:t>•  Muchas consultas a un mismo dominio con subdominios largos y aleatorios, a menudo tipo TXT o NULL.</a:t>
-            </a:r>
-          </a:p>
-          <a:p>
-            <a:pPr>
-              <a:spcAft>
-                <a:spcPts val="600"/>
-              </a:spcAft>
-            </a:pPr>
-            <a:r>
-              <a:rPr sz="1500">
-                <a:solidFill>
-                  <a:srgbClr val="22282E"/>
-                </a:solidFill>
-              </a:rPr>
-              <a:t>•  ❓ ¿Zeek reemplaza a Wireshark?</a:t>
+              <a:t>•  Estadística rápida del PCAP con tshark:</a:t>
+            </a:r>
+          </a:p>
+          <a:p>
+            <a:pPr>
+              <a:spcAft>
+                <a:spcPts val="600"/>
+              </a:spcAft>
+            </a:pPr>
+            <a:r>
+              <a:rPr sz="1500">
+                <a:solidFill>
+                  <a:srgbClr val="22282E"/>
+                </a:solidFill>
+              </a:rPr>
+              <a:t>•  Filtra tráfico HTTP y extrae hosts contactados:</a:t>
+            </a:r>
+          </a:p>
+          <a:p>
+            <a:pPr>
+              <a:spcAft>
+                <a:spcPts val="600"/>
+              </a:spcAft>
+            </a:pPr>
+            <a:r>
+              <a:rPr sz="1500">
+                <a:solidFill>
+                  <a:srgbClr val="22282E"/>
+                </a:solidFill>
+              </a:rPr>
+              <a:t>•  En Wireshark, usa Follow → TCP Stream para reconstruir los bytes de la sesión que quedaron disponibles en la captura.</a:t>
+            </a:r>
+          </a:p>
+          <a:p>
+            <a:pPr>
+              <a:spcAft>
+                <a:spcPts val="600"/>
+              </a:spcAft>
+            </a:pPr>
+            <a:r>
+              <a:rPr sz="1500">
+                <a:solidFill>
+                  <a:srgbClr val="22282E"/>
+                </a:solidFill>
+              </a:rPr>
+              <a:t>•  Extrae archivos transferidos:</a:t>
+            </a:r>
+          </a:p>
+          <a:p>
+            <a:pPr>
+              <a:spcAft>
+                <a:spcPts val="600"/>
+              </a:spcAft>
+            </a:pPr>
+            <a:r>
+              <a:rPr sz="1500">
+                <a:solidFill>
+                  <a:srgbClr val="22282E"/>
+                </a:solidFill>
+              </a:rPr>
+              <a:t>•  Wireshark: File → Export Objects → HTTP.</a:t>
+            </a:r>
+          </a:p>
+          <a:p>
+            <a:pPr>
+              <a:spcAft>
+                <a:spcPts val="600"/>
+              </a:spcAft>
+            </a:pPr>
+            <a:r>
+              <a:rPr sz="1500">
+                <a:solidFill>
+                  <a:srgbClr val="22282E"/>
+                </a:solidFill>
+              </a:rPr>
+              <a:t>•  NetworkMiner: carga el PCAP y revisa la pestaña Files.</a:t>
+            </a:r>
+          </a:p>
+          <a:p>
+            <a:pPr>
+              <a:spcAft>
+                <a:spcPts val="600"/>
+              </a:spcAft>
+            </a:pPr>
+            <a:r>
+              <a:rPr sz="1500">
+                <a:solidFill>
+                  <a:srgbClr val="22282E"/>
+                </a:solidFill>
+              </a:rPr>
+              <a:t>•  Detecta túnel DNS buscando subdominios largos y muchas TXT:</a:t>
             </a:r>
           </a:p>
         </p:txBody>
@@ -3526,7 +3501,7 @@
                   <a:srgbClr val="0B3D2E"/>
                 </a:solidFill>
               </a:rPr>
-              <a:t>🔗 Referencias</a:t>
+              <a:t>✍️ Ejercicios</a:t>
             </a:r>
           </a:p>
         </p:txBody>
@@ -3564,56 +3539,757 @@
                   <a:srgbClr val="22282E"/>
                 </a:solidFill>
               </a:rPr>
-              <a:t>•  Wireshark: &lt;https://www.wireshark.org/docs/&gt;</a:t>
-            </a:r>
-          </a:p>
-          <a:p>
-            <a:pPr>
-              <a:spcAft>
-                <a:spcPts val="600"/>
-              </a:spcAft>
-            </a:pPr>
-            <a:r>
-              <a:rPr sz="1500">
-                <a:solidFill>
-                  <a:srgbClr val="22282E"/>
-                </a:solidFill>
-              </a:rPr>
-              <a:t>•  Zeek: &lt;https://docs.zeek.org/&gt;</a:t>
-            </a:r>
-          </a:p>
-          <a:p>
-            <a:pPr>
-              <a:spcAft>
-                <a:spcPts val="600"/>
-              </a:spcAft>
-            </a:pPr>
-            <a:r>
-              <a:rPr sz="1500">
-                <a:solidFill>
-                  <a:srgbClr val="22282E"/>
-                </a:solidFill>
-              </a:rPr>
-              <a:t>•  NetworkMiner: &lt;https://www.netresec.com/?page=NetworkMiner&gt;</a:t>
-            </a:r>
-          </a:p>
-          <a:p>
-            <a:pPr>
-              <a:spcAft>
-                <a:spcPts val="600"/>
-              </a:spcAft>
-            </a:pPr>
-            <a:r>
-              <a:rPr sz="1500">
-                <a:solidFill>
-                  <a:srgbClr val="22282E"/>
-                </a:solidFill>
-              </a:rPr>
-              <a:t>•  RITA (beaconing): &lt;https://github.com/activecm/rita&gt;</a:t>
-            </a:r>
-          </a:p>
-        </p:txBody>
-      </p:sp>
+              <a:t>•  Filtra en Wireshark solo el tráfico de una IP y un puerto concretos.</a:t>
+            </a:r>
+          </a:p>
+          <a:p>
+            <a:pPr>
+              <a:spcAft>
+                <a:spcPts val="600"/>
+              </a:spcAft>
+            </a:pPr>
+            <a:r>
+              <a:rPr sz="1500">
+                <a:solidFill>
+                  <a:srgbClr val="22282E"/>
+                </a:solidFill>
+              </a:rPr>
+              <a:t>•  Extrae un archivo transferido por HTTP de un PCAP.</a:t>
+            </a:r>
+          </a:p>
+          <a:p>
+            <a:pPr>
+              <a:spcAft>
+                <a:spcPts val="600"/>
+              </a:spcAft>
+            </a:pPr>
+            <a:r>
+              <a:rPr sz="1500">
+                <a:solidFill>
+                  <a:srgbClr val="22282E"/>
+                </a:solidFill>
+              </a:rPr>
+              <a:t>•  Identifica un patrón de beaconing por su periodicidad.</a:t>
+            </a:r>
+          </a:p>
+          <a:p>
+            <a:pPr>
+              <a:spcAft>
+                <a:spcPts val="600"/>
+              </a:spcAft>
+            </a:pPr>
+            <a:r>
+              <a:rPr sz="1500">
+                <a:solidFill>
+                  <a:srgbClr val="22282E"/>
+                </a:solidFill>
+              </a:rPr>
+              <a:t>•  Detecta un túnel DNS por el volumen y forma de las consultas.</a:t>
+            </a:r>
+          </a:p>
+          <a:p>
+            <a:pPr>
+              <a:spcAft>
+                <a:spcPts val="600"/>
+              </a:spcAft>
+            </a:pPr>
+            <a:r>
+              <a:rPr sz="1500">
+                <a:solidFill>
+                  <a:srgbClr val="22282E"/>
+                </a:solidFill>
+              </a:rPr>
+              <a:t>•  Usa zeek-cut para listar las diez conversaciones más largas.</a:t>
+            </a:r>
+          </a:p>
+          <a:p>
+            <a:pPr>
+              <a:spcAft>
+                <a:spcPts val="600"/>
+              </a:spcAft>
+            </a:pPr>
+            <a:r>
+              <a:rPr sz="1500">
+                <a:solidFill>
+                  <a:srgbClr val="22282E"/>
+                </a:solidFill>
+              </a:rPr>
+              <a:t>•  Explica qué puedes y qué no puedes ver en tráfico TLS.</a:t>
+            </a:r>
+          </a:p>
+        </p:txBody>
+      </p:sp>
+    </p:spTree>
+  </p:cSld>
+  <p:clrMapOvr>
+    <a:masterClrMapping/>
+  </p:clrMapOvr>
+</p:sld>
+</file>
+
+<file path=ppt/slides/slide13.xml><?xml version="1.0" encoding="utf-8"?>
+<p:sld xmlns:a="http://schemas.openxmlformats.org/drawingml/2006/main" xmlns:p="http://schemas.openxmlformats.org/presentationml/2006/main" xmlns:r="http://schemas.openxmlformats.org/officeDocument/2006/relationships">
+  <p:cSld>
+    <p:spTree>
+      <p:nvGrpSpPr>
+        <p:cNvPr id="1" name=""/>
+        <p:cNvGrpSpPr/>
+        <p:nvPr/>
+      </p:nvGrpSpPr>
+      <p:grpSpPr/>
+      <p:sp>
+        <p:nvSpPr>
+          <p:cNvPr id="2" name="TextBox 1"/>
+          <p:cNvSpPr txBox="1"/>
+          <p:nvPr/>
+        </p:nvSpPr>
+        <p:spPr>
+          <a:xfrm>
+            <a:off x="457200" y="320040"/>
+            <a:ext cx="8229600" cy="822960"/>
+          </a:xfrm>
+          <a:prstGeom prst="rect">
+            <a:avLst/>
+          </a:prstGeom>
+          <a:noFill/>
+        </p:spPr>
+        <p:txBody>
+          <a:bodyPr wrap="square">
+            <a:spAutoFit/>
+          </a:bodyPr>
+          <a:lstStyle/>
+          <a:p>
+            <a:r>
+              <a:rPr sz="2600" b="1">
+                <a:solidFill>
+                  <a:srgbClr val="0B3D2E"/>
+                </a:solidFill>
+              </a:rPr>
+              <a:t>📝 Reto verificable</a:t>
+            </a:r>
+          </a:p>
+        </p:txBody>
+      </p:sp>
+      <p:sp>
+        <p:nvSpPr>
+          <p:cNvPr id="3" name="TextBox 2"/>
+          <p:cNvSpPr txBox="1"/>
+          <p:nvPr/>
+        </p:nvSpPr>
+        <p:spPr>
+          <a:xfrm>
+            <a:off x="457200" y="1280160"/>
+            <a:ext cx="8229600" cy="4937760"/>
+          </a:xfrm>
+          <a:prstGeom prst="rect">
+            <a:avLst/>
+          </a:prstGeom>
+          <a:noFill/>
+        </p:spPr>
+        <p:txBody>
+          <a:bodyPr wrap="square">
+            <a:spAutoFit/>
+          </a:bodyPr>
+          <a:lstStyle/>
+          <a:p>
+            <a:pPr>
+              <a:spcAft>
+                <a:spcPts val="600"/>
+              </a:spcAft>
+            </a:pPr>
+            <a:r>
+              <a:rPr sz="1500">
+                <a:solidFill>
+                  <a:srgbClr val="22282E"/>
+                </a:solidFill>
+              </a:rPr>
+              <a:t>•  Dado un PCAP que contiene un canal C2 con beaconing y una exfiltración de datos, identifica la IP del C2, el intervalo de beaconing y qué se exfiltró.</a:t>
+            </a:r>
+          </a:p>
+          <a:p>
+            <a:pPr>
+              <a:spcAft>
+                <a:spcPts val="600"/>
+              </a:spcAft>
+            </a:pPr>
+            <a:r>
+              <a:rPr sz="1500">
+                <a:solidFill>
+                  <a:srgbClr val="22282E"/>
+                </a:solidFill>
+              </a:rPr>
+              <a:t>•  Criterio de aceptación: reportas la IP/puerto del C2, el intervalo aproximado del beacon (con evidencia de la periodicidad), el método de exfiltración (DNS/HTTP) y, si es posible, el contenido o el…</a:t>
+            </a:r>
+          </a:p>
+        </p:txBody>
+      </p:sp>
+    </p:spTree>
+  </p:cSld>
+  <p:clrMapOvr>
+    <a:masterClrMapping/>
+  </p:clrMapOvr>
+</p:sld>
+</file>
+
+<file path=ppt/slides/slide14.xml><?xml version="1.0" encoding="utf-8"?>
+<p:sld xmlns:a="http://schemas.openxmlformats.org/drawingml/2006/main" xmlns:p="http://schemas.openxmlformats.org/presentationml/2006/main" xmlns:r="http://schemas.openxmlformats.org/officeDocument/2006/relationships">
+  <p:cSld>
+    <p:spTree>
+      <p:nvGrpSpPr>
+        <p:cNvPr id="1" name=""/>
+        <p:cNvGrpSpPr/>
+        <p:nvPr/>
+      </p:nvGrpSpPr>
+      <p:grpSpPr/>
+      <p:sp>
+        <p:nvSpPr>
+          <p:cNvPr id="2" name="TextBox 1"/>
+          <p:cNvSpPr txBox="1"/>
+          <p:nvPr/>
+        </p:nvSpPr>
+        <p:spPr>
+          <a:xfrm>
+            <a:off x="457200" y="320040"/>
+            <a:ext cx="8229600" cy="822960"/>
+          </a:xfrm>
+          <a:prstGeom prst="rect">
+            <a:avLst/>
+          </a:prstGeom>
+          <a:noFill/>
+        </p:spPr>
+        <p:txBody>
+          <a:bodyPr wrap="square">
+            <a:spAutoFit/>
+          </a:bodyPr>
+          <a:lstStyle/>
+          <a:p>
+            <a:r>
+              <a:rPr sz="2600" b="1">
+                <a:solidFill>
+                  <a:srgbClr val="0B3D2E"/>
+                </a:solidFill>
+              </a:rPr>
+              <a:t>⚠️ Errores comunes</a:t>
+            </a:r>
+          </a:p>
+        </p:txBody>
+      </p:sp>
+      <p:sp>
+        <p:nvSpPr>
+          <p:cNvPr id="3" name="TextBox 2"/>
+          <p:cNvSpPr txBox="1"/>
+          <p:nvPr/>
+        </p:nvSpPr>
+        <p:spPr>
+          <a:xfrm>
+            <a:off x="457200" y="1280160"/>
+            <a:ext cx="8229600" cy="4937760"/>
+          </a:xfrm>
+          <a:prstGeom prst="rect">
+            <a:avLst/>
+          </a:prstGeom>
+          <a:noFill/>
+        </p:spPr>
+        <p:txBody>
+          <a:bodyPr wrap="square">
+            <a:spAutoFit/>
+          </a:bodyPr>
+          <a:lstStyle/>
+          <a:p>
+            <a:pPr>
+              <a:spcAft>
+                <a:spcPts val="600"/>
+              </a:spcAft>
+            </a:pPr>
+            <a:r>
+              <a:rPr sz="1500">
+                <a:solidFill>
+                  <a:srgbClr val="22282E"/>
+                </a:solidFill>
+              </a:rPr>
+              <a:t>•  No ves contenido, solo cifrado — Es TLS. Analiza metadatos (SNI, JA3, tamaños) en vez del claro.</a:t>
+            </a:r>
+          </a:p>
+          <a:p>
+            <a:pPr>
+              <a:spcAft>
+                <a:spcPts val="600"/>
+              </a:spcAft>
+            </a:pPr>
+            <a:r>
+              <a:rPr sz="1500">
+                <a:solidFill>
+                  <a:srgbClr val="22282E"/>
+                </a:solidFill>
+              </a:rPr>
+              <a:t>•  Wireshark se cuelga con PCAP grande — Demasiado en memoria. Filtra con tshark o divide con editcap.</a:t>
+            </a:r>
+          </a:p>
+          <a:p>
+            <a:pPr>
+              <a:spcAft>
+                <a:spcPts val="600"/>
+              </a:spcAft>
+            </a:pPr>
+            <a:r>
+              <a:rPr sz="1500">
+                <a:solidFill>
+                  <a:srgbClr val="22282E"/>
+                </a:solidFill>
+              </a:rPr>
+              <a:t>•  No detectas el beacon — Jitter aleatorio del malware. Analiza distribución de intervalos, no valores exactos.</a:t>
+            </a:r>
+          </a:p>
+          <a:p>
+            <a:pPr>
+              <a:spcAft>
+                <a:spcPts val="600"/>
+              </a:spcAft>
+            </a:pPr>
+            <a:r>
+              <a:rPr sz="1500">
+                <a:solidFill>
+                  <a:srgbClr val="22282E"/>
+                </a:solidFill>
+              </a:rPr>
+              <a:t>•  Export Objects vacío — El archivo va fragmentado o cifrado. Prueba NetworkMiner o reensamblado manual.</a:t>
+            </a:r>
+          </a:p>
+          <a:p>
+            <a:pPr>
+              <a:spcAft>
+                <a:spcPts val="600"/>
+              </a:spcAft>
+            </a:pPr>
+            <a:r>
+              <a:rPr sz="1500">
+                <a:solidFill>
+                  <a:srgbClr val="22282E"/>
+                </a:solidFill>
+              </a:rPr>
+              <a:t>•  Zeek no genera logs — Ruta o versión incorrecta. Verifica instalación y permisos de escritura.</a:t>
+            </a:r>
+          </a:p>
+        </p:txBody>
+      </p:sp>
+    </p:spTree>
+  </p:cSld>
+  <p:clrMapOvr>
+    <a:masterClrMapping/>
+  </p:clrMapOvr>
+</p:sld>
+</file>
+
+<file path=ppt/slides/slide15.xml><?xml version="1.0" encoding="utf-8"?>
+<p:sld xmlns:a="http://schemas.openxmlformats.org/drawingml/2006/main" xmlns:p="http://schemas.openxmlformats.org/presentationml/2006/main" xmlns:r="http://schemas.openxmlformats.org/officeDocument/2006/relationships">
+  <p:cSld>
+    <p:spTree>
+      <p:nvGrpSpPr>
+        <p:cNvPr id="1" name=""/>
+        <p:cNvGrpSpPr/>
+        <p:nvPr/>
+      </p:nvGrpSpPr>
+      <p:grpSpPr/>
+      <p:sp>
+        <p:nvSpPr>
+          <p:cNvPr id="2" name="TextBox 1"/>
+          <p:cNvSpPr txBox="1"/>
+          <p:nvPr/>
+        </p:nvSpPr>
+        <p:spPr>
+          <a:xfrm>
+            <a:off x="457200" y="320040"/>
+            <a:ext cx="8229600" cy="822960"/>
+          </a:xfrm>
+          <a:prstGeom prst="rect">
+            <a:avLst/>
+          </a:prstGeom>
+          <a:noFill/>
+        </p:spPr>
+        <p:txBody>
+          <a:bodyPr wrap="square">
+            <a:spAutoFit/>
+          </a:bodyPr>
+          <a:lstStyle/>
+          <a:p>
+            <a:r>
+              <a:rPr sz="2600" b="1">
+                <a:solidFill>
+                  <a:srgbClr val="0B3D2E"/>
+                </a:solidFill>
+              </a:rPr>
+              <a:t>❓ Preguntas frecuentes</a:t>
+            </a:r>
+          </a:p>
+        </p:txBody>
+      </p:sp>
+      <p:sp>
+        <p:nvSpPr>
+          <p:cNvPr id="3" name="TextBox 2"/>
+          <p:cNvSpPr txBox="1"/>
+          <p:nvPr/>
+        </p:nvSpPr>
+        <p:spPr>
+          <a:xfrm>
+            <a:off x="457200" y="1280160"/>
+            <a:ext cx="8229600" cy="4937760"/>
+          </a:xfrm>
+          <a:prstGeom prst="rect">
+            <a:avLst/>
+          </a:prstGeom>
+          <a:noFill/>
+        </p:spPr>
+        <p:txBody>
+          <a:bodyPr wrap="square">
+            <a:spAutoFit/>
+          </a:bodyPr>
+          <a:lstStyle/>
+          <a:p>
+            <a:pPr>
+              <a:spcAft>
+                <a:spcPts val="600"/>
+              </a:spcAft>
+            </a:pPr>
+            <a:r>
+              <a:rPr sz="1500">
+                <a:solidFill>
+                  <a:srgbClr val="22282E"/>
+                </a:solidFill>
+              </a:rPr>
+              <a:t>•  ❓ ¿PCAP o NetFlow?</a:t>
+            </a:r>
+          </a:p>
+          <a:p>
+            <a:pPr>
+              <a:spcAft>
+                <a:spcPts val="600"/>
+              </a:spcAft>
+            </a:pPr>
+            <a:r>
+              <a:rPr sz="1500">
+                <a:solidFill>
+                  <a:srgbClr val="22282E"/>
+                </a:solidFill>
+              </a:rPr>
+              <a:t>•  PCAP puede aportar contenido y cabeceras con mayor detalle, pero consume más almacenamiento; NetFlow resume conversaciones y facilita cobertura temporal. Se elige una o ambas fuentes según pregunta…</a:t>
+            </a:r>
+          </a:p>
+          <a:p>
+            <a:pPr>
+              <a:spcAft>
+                <a:spcPts val="600"/>
+              </a:spcAft>
+            </a:pPr>
+            <a:r>
+              <a:rPr sz="1500">
+                <a:solidFill>
+                  <a:srgbClr val="22282E"/>
+                </a:solidFill>
+              </a:rPr>
+              <a:t>•  ❓ ¿Puedo descifrar TLS?</a:t>
+            </a:r>
+          </a:p>
+          <a:p>
+            <a:pPr>
+              <a:spcAft>
+                <a:spcPts val="600"/>
+              </a:spcAft>
+            </a:pPr>
+            <a:r>
+              <a:rPr sz="1500">
+                <a:solidFill>
+                  <a:srgbClr val="22282E"/>
+                </a:solidFill>
+              </a:rPr>
+              <a:t>•  Solo si tienes las claves o el SSLKEYLOGFILE. Sin ellas, trabajas con metadatos: SNI, certificados, JA3, tamaños y tiempos.</a:t>
+            </a:r>
+          </a:p>
+          <a:p>
+            <a:pPr>
+              <a:spcAft>
+                <a:spcPts val="600"/>
+              </a:spcAft>
+            </a:pPr>
+            <a:r>
+              <a:rPr sz="1500">
+                <a:solidFill>
+                  <a:srgbClr val="22282E"/>
+                </a:solidFill>
+              </a:rPr>
+              <a:t>•  ❓ ¿Cómo se ve un túnel DNS?</a:t>
+            </a:r>
+          </a:p>
+          <a:p>
+            <a:pPr>
+              <a:spcAft>
+                <a:spcPts val="600"/>
+              </a:spcAft>
+            </a:pPr>
+            <a:r>
+              <a:rPr sz="1500">
+                <a:solidFill>
+                  <a:srgbClr val="22282E"/>
+                </a:solidFill>
+              </a:rPr>
+              <a:t>•  Muchas consultas a un mismo dominio con subdominios largos y aleatorios, a menudo tipo TXT o NULL.</a:t>
+            </a:r>
+          </a:p>
+          <a:p>
+            <a:pPr>
+              <a:spcAft>
+                <a:spcPts val="600"/>
+              </a:spcAft>
+            </a:pPr>
+            <a:r>
+              <a:rPr sz="1500">
+                <a:solidFill>
+                  <a:srgbClr val="22282E"/>
+                </a:solidFill>
+              </a:rPr>
+              <a:t>•  ❓ ¿Zeek reemplaza a Wireshark?</a:t>
+            </a:r>
+          </a:p>
+        </p:txBody>
+      </p:sp>
+    </p:spTree>
+  </p:cSld>
+  <p:clrMapOvr>
+    <a:masterClrMapping/>
+  </p:clrMapOvr>
+</p:sld>
+</file>
+
+<file path=ppt/slides/slide16.xml><?xml version="1.0" encoding="utf-8"?>
+<p:sld xmlns:a="http://schemas.openxmlformats.org/drawingml/2006/main" xmlns:p="http://schemas.openxmlformats.org/presentationml/2006/main" xmlns:r="http://schemas.openxmlformats.org/officeDocument/2006/relationships">
+  <p:cSld>
+    <p:spTree>
+      <p:nvGrpSpPr>
+        <p:cNvPr id="1" name=""/>
+        <p:cNvGrpSpPr/>
+        <p:nvPr/>
+      </p:nvGrpSpPr>
+      <p:grpSpPr/>
+      <p:sp>
+        <p:nvSpPr>
+          <p:cNvPr id="2" name="TextBox 1"/>
+          <p:cNvSpPr txBox="1"/>
+          <p:nvPr/>
+        </p:nvSpPr>
+        <p:spPr>
+          <a:xfrm>
+            <a:off x="457200" y="320040"/>
+            <a:ext cx="8229600" cy="822960"/>
+          </a:xfrm>
+          <a:prstGeom prst="rect">
+            <a:avLst/>
+          </a:prstGeom>
+          <a:noFill/>
+        </p:spPr>
+        <p:txBody>
+          <a:bodyPr wrap="square">
+            <a:spAutoFit/>
+          </a:bodyPr>
+          <a:lstStyle/>
+          <a:p>
+            <a:r>
+              <a:rPr sz="2600" b="1">
+                <a:solidFill>
+                  <a:srgbClr val="0B3D2E"/>
+                </a:solidFill>
+              </a:rPr>
+              <a:t>🔗 Referencias verificables y alcance</a:t>
+            </a:r>
+          </a:p>
+        </p:txBody>
+      </p:sp>
+      <p:sp>
+        <p:nvSpPr>
+          <p:cNvPr id="3" name="TextBox 2"/>
+          <p:cNvSpPr txBox="1"/>
+          <p:nvPr/>
+        </p:nvSpPr>
+        <p:spPr>
+          <a:xfrm>
+            <a:off x="457200" y="1280160"/>
+            <a:ext cx="8229600" cy="4937760"/>
+          </a:xfrm>
+          <a:prstGeom prst="rect">
+            <a:avLst/>
+          </a:prstGeom>
+          <a:noFill/>
+        </p:spPr>
+        <p:txBody>
+          <a:bodyPr wrap="square">
+            <a:spAutoFit/>
+          </a:bodyPr>
+          <a:lstStyle/>
+          <a:p>
+            <a:pPr>
+              <a:spcAft>
+                <a:spcPts val="600"/>
+              </a:spcAft>
+            </a:pPr>
+            <a:r>
+              <a:rPr sz="1500">
+                <a:solidFill>
+                  <a:srgbClr val="22282E"/>
+                </a:solidFill>
+              </a:rPr>
+              <a:t>•  Wireshark User’s Guide: &lt;https://www.wireshark.org/docs/wsughtml/&gt; — documentación oficial para captura, reensamblado, análisis y exportación de objetos.</a:t>
+            </a:r>
+          </a:p>
+          <a:p>
+            <a:pPr>
+              <a:spcAft>
+                <a:spcPts val="600"/>
+              </a:spcAft>
+            </a:pPr>
+            <a:r>
+              <a:rPr sz="1500">
+                <a:solidFill>
+                  <a:srgbClr val="22282E"/>
+                </a:solidFill>
+              </a:rPr>
+              <a:t>•  Wireshark Display Filter Reference: &lt;https://www.wireshark.org/docs/man-pages/wireshark-filter.html&gt; — sintaxis oficial; aclara que un filtro de visualización no elimina paquetes del archivo.</a:t>
+            </a:r>
+          </a:p>
+          <a:p>
+            <a:pPr>
+              <a:spcAft>
+                <a:spcPts val="600"/>
+              </a:spcAft>
+            </a:pPr>
+            <a:r>
+              <a:rPr sz="1500">
+                <a:solidFill>
+                  <a:srgbClr val="22282E"/>
+                </a:solidFill>
+              </a:rPr>
+              <a:t>•  Zeek Documentation: &lt;https://docs.zeek.org/&gt; — referencia oficial para los registros estructurados y el procesamiento de PCAP.</a:t>
+            </a:r>
+          </a:p>
+          <a:p>
+            <a:pPr>
+              <a:spcAft>
+                <a:spcPts val="600"/>
+              </a:spcAft>
+            </a:pPr>
+            <a:r>
+              <a:rPr sz="1500">
+                <a:solidFill>
+                  <a:srgbClr val="22282E"/>
+                </a:solidFill>
+              </a:rPr>
+              <a:t>•  NetworkMiner: &lt;https://www.netresec.com/?page=NetworkMiner&gt; — documentación del proveedor para extracción y reconstrucción; sus resultados deben validarse contra el PCAP.</a:t>
+            </a:r>
+          </a:p>
+          <a:p>
+            <a:pPr>
+              <a:spcAft>
+                <a:spcPts val="600"/>
+              </a:spcAft>
+            </a:pPr>
+            <a:r>
+              <a:rPr sz="1500">
+                <a:solidFill>
+                  <a:srgbClr val="22282E"/>
+                </a:solidFill>
+              </a:rPr>
+              <a:t>•  RITA: &lt;https://github.com/activecm/rita&gt; — proyecto abierto para analizar metadatos de Zeek; su puntuación prioriza conexiones y no sustituye la corroboración.</a:t>
+            </a:r>
+          </a:p>
+          <a:p>
+            <a:pPr>
+              <a:spcAft>
+                <a:spcPts val="600"/>
+              </a:spcAft>
+            </a:pPr>
+            <a:r>
+              <a:rPr sz="1500">
+                <a:solidFill>
+                  <a:srgbClr val="22282E"/>
+                </a:solidFill>
+              </a:rPr>
+              <a:t>•  NIST SP 800-86: &lt;https://doi.org/10.6028/NIST.SP.800-86&gt; — marco de integración de técnicas forenses en respuesta a incidentes; no prescribe una única herramienta.</a:t>
+            </a:r>
+          </a:p>
+        </p:txBody>
+      </p:sp>
+    </p:spTree>
+  </p:cSld>
+  <p:clrMapOvr>
+    <a:masterClrMapping/>
+  </p:clrMapOvr>
+</p:sld>
+</file>
+
+<file path=ppt/slides/slide17.xml><?xml version="1.0" encoding="utf-8"?>
+<p:sld xmlns:a="http://schemas.openxmlformats.org/drawingml/2006/main" xmlns:p="http://schemas.openxmlformats.org/presentationml/2006/main" xmlns:r="http://schemas.openxmlformats.org/officeDocument/2006/relationships">
+  <p:cSld>
+    <p:spTree>
+      <p:nvGrpSpPr>
+        <p:cNvPr id="1" name=""/>
+        <p:cNvGrpSpPr/>
+        <p:nvPr/>
+      </p:nvGrpSpPr>
+      <p:grpSpPr/>
+      <p:sp>
+        <p:nvSpPr>
+          <p:cNvPr id="2" name="TextBox 1"/>
+          <p:cNvSpPr txBox="1"/>
+          <p:nvPr/>
+        </p:nvSpPr>
+        <p:spPr>
+          <a:xfrm>
+            <a:off x="457200" y="274320"/>
+            <a:ext cx="8229600" cy="640080"/>
+          </a:xfrm>
+          <a:prstGeom prst="rect">
+            <a:avLst/>
+          </a:prstGeom>
+          <a:noFill/>
+        </p:spPr>
+        <p:txBody>
+          <a:bodyPr wrap="square">
+            <a:spAutoFit/>
+          </a:bodyPr>
+          <a:lstStyle/>
+          <a:p>
+            <a:r>
+              <a:rPr sz="2200" b="1">
+                <a:solidFill>
+                  <a:srgbClr val="0B3D2E"/>
+                </a:solidFill>
+              </a:rPr>
+              <a:t>Diagrama de la clase</a:t>
+            </a:r>
+          </a:p>
+        </p:txBody>
+      </p:sp>
+      <p:pic>
+        <p:nvPicPr>
+          <p:cNvPr id="3" name="Picture 2" descr="8066a2e21127c8e0.png"/>
+          <p:cNvPicPr>
+            <a:picLocks noChangeAspect="1"/>
+          </p:cNvPicPr>
+          <p:nvPr/>
+        </p:nvPicPr>
+        <p:blipFill>
+          <a:blip r:embed="rId2"/>
+          <a:stretch>
+            <a:fillRect/>
+          </a:stretch>
+        </p:blipFill>
+        <p:spPr>
+          <a:xfrm>
+            <a:off x="457200" y="1972934"/>
+            <a:ext cx="8229599" cy="3552211"/>
+          </a:xfrm>
+          <a:prstGeom prst="rect">
+            <a:avLst/>
+          </a:prstGeom>
+        </p:spPr>
+      </p:pic>
     </p:spTree>
   </p:cSld>
   <p:clrMapOvr>
@@ -3698,7 +4374,7 @@
                   <a:srgbClr val="22282E"/>
                 </a:solidFill>
               </a:rPr>
-              <a:t>•  Aprender a reconstruir lo que pasó en la red durante un incidente a partir de capturas de paquetes (PCAP) y registros de flujo. Al terminar podrás identificar exfiltración, canales de mando y control (C2), tunneling y movimiento lateral usando Wireshark, tshark, Zeek y NetworkMiner.</a:t>
+              <a:t>•  Aprender a reconstruir lo que pasó en la red durante un incidente a partir de capturas de paquetes (PCAP) y registros de flujo. Al terminar podrás identificar exfiltración, canales de mando y control…</a:t>
             </a:r>
           </a:p>
         </p:txBody>
@@ -4092,7 +4768,7 @@
                   <a:srgbClr val="0B3D2E"/>
                 </a:solidFill>
               </a:rPr>
-              <a:t>📖 Definiciones y características</a:t>
+              <a:t>🧠 Explicación en profundidad</a:t>
             </a:r>
           </a:p>
         </p:txBody>
@@ -4130,97 +4806,97 @@
                   <a:srgbClr val="22282E"/>
                 </a:solidFill>
               </a:rPr>
-              <a:t>•  PCAP: captura completa de paquetes. Característica: máximo detalle, pero pesada.</a:t>
-            </a:r>
-          </a:p>
-          <a:p>
-            <a:pPr>
-              <a:spcAft>
-                <a:spcPts val="600"/>
-              </a:spcAft>
-            </a:pPr>
-            <a:r>
-              <a:rPr sz="1500">
-                <a:solidFill>
-                  <a:srgbClr val="22282E"/>
-                </a:solidFill>
-              </a:rPr>
-              <a:t>•  NetFlow/IPFIX: metadatos de flujos (quién habló con quién, cuánto). Característica: liviano y escalable, sin contenido.</a:t>
-            </a:r>
-          </a:p>
-          <a:p>
-            <a:pPr>
-              <a:spcAft>
-                <a:spcPts val="600"/>
-              </a:spcAft>
-            </a:pPr>
-            <a:r>
-              <a:rPr sz="1500">
-                <a:solidFill>
-                  <a:srgbClr val="22282E"/>
-                </a:solidFill>
-              </a:rPr>
-              <a:t>•  Beaconing: comunicación periódica de un implante con su C2. Característica: intervalos regulares delatan el patrón.</a:t>
-            </a:r>
-          </a:p>
-          <a:p>
-            <a:pPr>
-              <a:spcAft>
-                <a:spcPts val="600"/>
-              </a:spcAft>
-            </a:pPr>
-            <a:r>
-              <a:rPr sz="1500">
-                <a:solidFill>
-                  <a:srgbClr val="22282E"/>
-                </a:solidFill>
-              </a:rPr>
-              <a:t>•  Túnel DNS: exfiltración disfrazada de consultas DNS. Característica: subdominios largos y muchas consultas TXT.</a:t>
-            </a:r>
-          </a:p>
-          <a:p>
-            <a:pPr>
-              <a:spcAft>
-                <a:spcPts val="600"/>
-              </a:spcAft>
-            </a:pPr>
-            <a:r>
-              <a:rPr sz="1500">
-                <a:solidFill>
-                  <a:srgbClr val="22282E"/>
-                </a:solidFill>
-              </a:rPr>
-              <a:t>•  Zeek (antes Bro): analizador de red que genera logs estructurados (conn, dns, http, ssl…). Característica: convierte PCAP en tablas analizables.</a:t>
-            </a:r>
-          </a:p>
-          <a:p>
-            <a:pPr>
-              <a:spcAft>
-                <a:spcPts val="600"/>
-              </a:spcAft>
-            </a:pPr>
-            <a:r>
-              <a:rPr sz="1500">
-                <a:solidFill>
-                  <a:srgbClr val="22282E"/>
-                </a:solidFill>
-              </a:rPr>
-              <a:t>•  JA3/JA3S: huellas del handshake TLS. Característica: identifican clientes/servidores incluso cifrados.</a:t>
-            </a:r>
-          </a:p>
-          <a:p>
-            <a:pPr>
-              <a:spcAft>
-                <a:spcPts val="600"/>
-              </a:spcAft>
-            </a:pPr>
-            <a:r>
-              <a:rPr sz="1500">
-                <a:solidFill>
-                  <a:srgbClr val="22282E"/>
-                </a:solidFill>
-              </a:rPr>
-              <a:t>•  Reensamblado de flujo (Follow TCP Stream): reconstruye la conversación de una sesión. Característica: revela credenciales y comandos en claro.</a:t>
+              <a:t>•  La forense de red reconstruye comunicaciones desde capturas y metadatos. PCAP ofrece detalle pero solo donde existió sensor; flow resume relaciones; Zeek interpreta protocolos. NAT, balanceadores…</a:t>
+            </a:r>
+          </a:p>
+          <a:p>
+            <a:pPr>
+              <a:spcAft>
+                <a:spcPts val="600"/>
+              </a:spcAft>
+            </a:pPr>
+            <a:r>
+              <a:rPr sz="1500">
+                <a:solidFill>
+                  <a:srgbClr val="22282E"/>
+                </a:solidFill>
+              </a:rPr>
+              <a:t>•  La tupla de red identifica una conversación en un punto, no necesariamente al usuario final. La reconstrucción TCP considera retransmisión, pérdida y orden. Extraer un objeto de HTTP no demuestra que…</a:t>
+            </a:r>
+          </a:p>
+          <a:p>
+            <a:pPr>
+              <a:spcAft>
+                <a:spcPts val="600"/>
+              </a:spcAft>
+            </a:pPr>
+            <a:r>
+              <a:rPr sz="1500">
+                <a:solidFill>
+                  <a:srgbClr val="22282E"/>
+                </a:solidFill>
+              </a:rPr>
+              <a:t>•  Un PCAP puede conservar cabeceras y carga útil, pero únicamente de los paquetes que llegaron al sensor. Un flujo NetFlow/IPFIX resume extremos, puertos, duración y volumen; sacrifica contenido para…</a:t>
+            </a:r>
+          </a:p>
+          <a:p>
+            <a:pPr>
+              <a:spcAft>
+                <a:spcPts val="600"/>
+              </a:spcAft>
+            </a:pPr>
+            <a:r>
+              <a:rPr sz="1500">
+                <a:solidFill>
+                  <a:srgbClr val="22282E"/>
+                </a:solidFill>
+              </a:rPr>
+              <a:t>•  Antes de atribuir una IP a una persona se dibuja el camino observado: VLAN, punto de captura, NAT, proxy, VPN, balanceador y resolución temporal de DHCP. La IP que aparece como origen en un sensor…</a:t>
+            </a:r>
+          </a:p>
+          <a:p>
+            <a:pPr>
+              <a:spcAft>
+                <a:spcPts val="600"/>
+              </a:spcAft>
+            </a:pPr>
+            <a:r>
+              <a:rPr sz="1500">
+                <a:solidFill>
+                  <a:srgbClr val="22282E"/>
+                </a:solidFill>
+              </a:rPr>
+              <a:t>•  Wireshark distingue filtros de captura y filtros de visualización. El primero decide qué paquetes se conservan y, por tanto, puede producir una pérdida irreversible; el segundo cambia solamente la…</a:t>
+            </a:r>
+          </a:p>
+          <a:p>
+            <a:pPr>
+              <a:spcAft>
+                <a:spcPts val="600"/>
+              </a:spcAft>
+            </a:pPr>
+            <a:r>
+              <a:rPr sz="1500">
+                <a:solidFill>
+                  <a:srgbClr val="22282E"/>
+                </a:solidFill>
+              </a:rPr>
+              <a:t>•  La extracción de objetos es un paso analítico, no una conclusión. Se registra flujo, offset o número de paquete, método de extracción y hash del objeto. Después se valida tipo real, estructura y…</a:t>
+            </a:r>
+          </a:p>
+          <a:p>
+            <a:pPr>
+              <a:spcAft>
+                <a:spcPts val="600"/>
+              </a:spcAft>
+            </a:pPr>
+            <a:r>
+              <a:rPr sz="1500">
+                <a:solidFill>
+                  <a:srgbClr val="22282E"/>
+                </a:solidFill>
+              </a:rPr>
+              <a:t>•  Beaconing describe contactos repetidos que pueden ser compatibles con C2, pero servicios de actualización, telemetría y monitoreo también generan periodicidad. Se comparan intervalos, jitter…</a:t>
             </a:r>
           </a:p>
         </p:txBody>
@@ -4271,7 +4947,7 @@
                   <a:srgbClr val="0B3D2E"/>
                 </a:solidFill>
               </a:rPr>
-              <a:t>🧰 Herramientas y preparación</a:t>
+              <a:t>📔 Glosario</a:t>
             </a:r>
           </a:p>
         </p:txBody>
@@ -4309,37 +4985,97 @@
                   <a:srgbClr val="22282E"/>
                 </a:solidFill>
               </a:rPr>
-              <a:t>•  Captura: tcpdump, dumpcap.</a:t>
-            </a:r>
-          </a:p>
-          <a:p>
-            <a:pPr>
-              <a:spcAft>
-                <a:spcPts val="600"/>
-              </a:spcAft>
-            </a:pPr>
-            <a:r>
-              <a:rPr sz="1500">
-                <a:solidFill>
-                  <a:srgbClr val="22282E"/>
-                </a:solidFill>
-              </a:rPr>
-              <a:t>•  Análisis: Wireshark y tshark, Zeek, NetworkMiner (extracción de archivos), RITA (detección de beaconing sobre logs de Zeek).</a:t>
-            </a:r>
-          </a:p>
-          <a:p>
-            <a:pPr>
-              <a:spcAft>
-                <a:spcPts val="600"/>
-              </a:spcAft>
-            </a:pPr>
-            <a:r>
-              <a:rPr sz="1500">
-                <a:solidFill>
-                  <a:srgbClr val="22282E"/>
-                </a:solidFill>
-              </a:rPr>
-              <a:t>•  Muestras: usa PCAPs propios o datasets públicos de práctica (por ejemplo, capturas de Malware-Traffic-Analysis con fines educativos). Analiza malware solo en laboratorio aislado.</a:t>
+              <a:t>•  PCAP: captura de paquetes.</a:t>
+            </a:r>
+          </a:p>
+          <a:p>
+            <a:pPr>
+              <a:spcAft>
+                <a:spcPts val="600"/>
+              </a:spcAft>
+            </a:pPr>
+            <a:r>
+              <a:rPr sz="1500">
+                <a:solidFill>
+                  <a:srgbClr val="22282E"/>
+                </a:solidFill>
+              </a:rPr>
+              <a:t>•  NetFlow/IPFIX: resumen de flujos.</a:t>
+            </a:r>
+          </a:p>
+          <a:p>
+            <a:pPr>
+              <a:spcAft>
+                <a:spcPts val="600"/>
+              </a:spcAft>
+            </a:pPr>
+            <a:r>
+              <a:rPr sz="1500">
+                <a:solidFill>
+                  <a:srgbClr val="22282E"/>
+                </a:solidFill>
+              </a:rPr>
+              <a:t>•  5-tuple: IP y puerto origen/destino más protocolo.</a:t>
+            </a:r>
+          </a:p>
+          <a:p>
+            <a:pPr>
+              <a:spcAft>
+                <a:spcPts val="600"/>
+              </a:spcAft>
+            </a:pPr>
+            <a:r>
+              <a:rPr sz="1500">
+                <a:solidFill>
+                  <a:srgbClr val="22282E"/>
+                </a:solidFill>
+              </a:rPr>
+              <a:t>•  Reassembly: reconstrucción del flujo TCP.</a:t>
+            </a:r>
+          </a:p>
+          <a:p>
+            <a:pPr>
+              <a:spcAft>
+                <a:spcPts val="600"/>
+              </a:spcAft>
+            </a:pPr>
+            <a:r>
+              <a:rPr sz="1500">
+                <a:solidFill>
+                  <a:srgbClr val="22282E"/>
+                </a:solidFill>
+              </a:rPr>
+              <a:t>•  NAT: traducción que modifica direcciones visibles.</a:t>
+            </a:r>
+          </a:p>
+          <a:p>
+            <a:pPr>
+              <a:spcAft>
+                <a:spcPts val="600"/>
+              </a:spcAft>
+            </a:pPr>
+            <a:r>
+              <a:rPr sz="1500">
+                <a:solidFill>
+                  <a:srgbClr val="22282E"/>
+                </a:solidFill>
+              </a:rPr>
+              <a:t>•  Packet loss: tráfico no capturado por el sensor.</a:t>
+            </a:r>
+          </a:p>
+          <a:p>
+            <a:pPr>
+              <a:spcAft>
+                <a:spcPts val="600"/>
+              </a:spcAft>
+            </a:pPr>
+            <a:r>
+              <a:rPr sz="1500">
+                <a:solidFill>
+                  <a:srgbClr val="22282E"/>
+                </a:solidFill>
+              </a:rPr>
+              <a:t>•  Sessionization: agrupación de paquetes o eventos en conversaciones.</a:t>
             </a:r>
           </a:p>
         </p:txBody>
@@ -4390,7 +5126,7 @@
                   <a:srgbClr val="0B3D2E"/>
                 </a:solidFill>
               </a:rPr>
-              <a:t>🧪 Laboratorio guiado</a:t>
+              <a:t>📖 Definiciones y características</a:t>
             </a:r>
           </a:p>
         </p:txBody>
@@ -4428,97 +5164,97 @@
                   <a:srgbClr val="22282E"/>
                 </a:solidFill>
               </a:rPr>
-              <a:t>•  Estadística rápida del PCAP con tshark:</a:t>
-            </a:r>
-          </a:p>
-          <a:p>
-            <a:pPr>
-              <a:spcAft>
-                <a:spcPts val="600"/>
-              </a:spcAft>
-            </a:pPr>
-            <a:r>
-              <a:rPr sz="1500">
-                <a:solidFill>
-                  <a:srgbClr val="22282E"/>
-                </a:solidFill>
-              </a:rPr>
-              <a:t>•  tshark -r captura.pcap -q -z conv,tcp</a:t>
-            </a:r>
-          </a:p>
-          <a:p>
-            <a:pPr>
-              <a:spcAft>
-                <a:spcPts val="600"/>
-              </a:spcAft>
-            </a:pPr>
-            <a:r>
-              <a:rPr sz="1500">
-                <a:solidFill>
-                  <a:srgbClr val="22282E"/>
-                </a:solidFill>
-              </a:rPr>
-              <a:t>•  Filtra tráfico HTTP y extrae hosts contactados:</a:t>
-            </a:r>
-          </a:p>
-          <a:p>
-            <a:pPr>
-              <a:spcAft>
-                <a:spcPts val="600"/>
-              </a:spcAft>
-            </a:pPr>
-            <a:r>
-              <a:rPr sz="1500">
-                <a:solidFill>
-                  <a:srgbClr val="22282E"/>
-                </a:solidFill>
-              </a:rPr>
-              <a:t>•  tshark -r captura.pcap -Y "http.request" -T fields -e http.host -e http.request.uri</a:t>
-            </a:r>
-          </a:p>
-          <a:p>
-            <a:pPr>
-              <a:spcAft>
-                <a:spcPts val="600"/>
-              </a:spcAft>
-            </a:pPr>
-            <a:r>
-              <a:rPr sz="1500">
-                <a:solidFill>
-                  <a:srgbClr val="22282E"/>
-                </a:solidFill>
-              </a:rPr>
-              <a:t>•  En Wireshark, usa Follow → TCP Stream sobre una sesión sospechosa para ver la conversación completa.</a:t>
-            </a:r>
-          </a:p>
-          <a:p>
-            <a:pPr>
-              <a:spcAft>
-                <a:spcPts val="600"/>
-              </a:spcAft>
-            </a:pPr>
-            <a:r>
-              <a:rPr sz="1500">
-                <a:solidFill>
-                  <a:srgbClr val="22282E"/>
-                </a:solidFill>
-              </a:rPr>
-              <a:t>•  Extrae archivos transferidos:</a:t>
-            </a:r>
-          </a:p>
-          <a:p>
-            <a:pPr>
-              <a:spcAft>
-                <a:spcPts val="600"/>
-              </a:spcAft>
-            </a:pPr>
-            <a:r>
-              <a:rPr sz="1500">
-                <a:solidFill>
-                  <a:srgbClr val="22282E"/>
-                </a:solidFill>
-              </a:rPr>
-              <a:t>•  Wireshark: File → Export Objects → HTTP.</a:t>
+              <a:t>•  PCAP: archivo de paquetes observados por un sensor. Característica: puede conservar gran detalle, pero su cobertura depende del punto de captura, filtros y pérdidas.</a:t>
+            </a:r>
+          </a:p>
+          <a:p>
+            <a:pPr>
+              <a:spcAft>
+                <a:spcPts val="600"/>
+              </a:spcAft>
+            </a:pPr>
+            <a:r>
+              <a:rPr sz="1500">
+                <a:solidFill>
+                  <a:srgbClr val="22282E"/>
+                </a:solidFill>
+              </a:rPr>
+              <a:t>•  NetFlow/IPFIX: metadatos de flujos (quién habló con quién, cuánto). Característica: liviano y escalable, sin contenido.</a:t>
+            </a:r>
+          </a:p>
+          <a:p>
+            <a:pPr>
+              <a:spcAft>
+                <a:spcPts val="600"/>
+              </a:spcAft>
+            </a:pPr>
+            <a:r>
+              <a:rPr sz="1500">
+                <a:solidFill>
+                  <a:srgbClr val="22282E"/>
+                </a:solidFill>
+              </a:rPr>
+              <a:t>•  Beaconing: patrón de contactos repetidos compatible con automatización o C2. Característica: la periodicidad orienta el análisis, pero necesita contexto y corroboración.</a:t>
+            </a:r>
+          </a:p>
+          <a:p>
+            <a:pPr>
+              <a:spcAft>
+                <a:spcPts val="600"/>
+              </a:spcAft>
+            </a:pPr>
+            <a:r>
+              <a:rPr sz="1500">
+                <a:solidFill>
+                  <a:srgbClr val="22282E"/>
+                </a:solidFill>
+              </a:rPr>
+              <a:t>•  Túnel DNS: uso de consultas o respuestas DNS para transportar datos. Característica: longitud, entropía, volumen y tipos de registro son indicadores, no una prueba aislada.</a:t>
+            </a:r>
+          </a:p>
+          <a:p>
+            <a:pPr>
+              <a:spcAft>
+                <a:spcPts val="600"/>
+              </a:spcAft>
+            </a:pPr>
+            <a:r>
+              <a:rPr sz="1500">
+                <a:solidFill>
+                  <a:srgbClr val="22282E"/>
+                </a:solidFill>
+              </a:rPr>
+              <a:t>•  Zeek (antes Bro): analizador de red que genera logs estructurados (conn, dns, http, ssl…). Característica: convierte PCAP en tablas analizables.</a:t>
+            </a:r>
+          </a:p>
+          <a:p>
+            <a:pPr>
+              <a:spcAft>
+                <a:spcPts val="600"/>
+              </a:spcAft>
+            </a:pPr>
+            <a:r>
+              <a:rPr sz="1500">
+                <a:solidFill>
+                  <a:srgbClr val="22282E"/>
+                </a:solidFill>
+              </a:rPr>
+              <a:t>•  JA3/JA3S: huellas calculadas a partir de elementos del handshake TLS. Característica: ayudan a agrupar tráfico, pero no identifican de forma inequívoca un cliente o servidor.</a:t>
+            </a:r>
+          </a:p>
+          <a:p>
+            <a:pPr>
+              <a:spcAft>
+                <a:spcPts val="600"/>
+              </a:spcAft>
+            </a:pPr>
+            <a:r>
+              <a:rPr sz="1500">
+                <a:solidFill>
+                  <a:srgbClr val="22282E"/>
+                </a:solidFill>
+              </a:rPr>
+              <a:t>•  Reensamblado de flujo (Follow TCP Stream): ordena los bytes capturados de una conversación. Característica: puede mostrar contenido en claro cuando fue observado, sin recuperar paquetes ausentes ni…</a:t>
             </a:r>
           </a:p>
         </p:txBody>
@@ -4569,7 +5305,7 @@
                   <a:srgbClr val="0B3D2E"/>
                 </a:solidFill>
               </a:rPr>
-              <a:t>✍️ Ejercicios</a:t>
+              <a:t>🔍 Caso razonado — descarga periódica por HTTPS</a:t>
             </a:r>
           </a:p>
         </p:txBody>
@@ -4607,82 +5343,22 @@
                   <a:srgbClr val="22282E"/>
                 </a:solidFill>
               </a:rPr>
-              <a:t>•  Filtra en Wireshark solo el tráfico de una IP y un puerto concretos.</a:t>
-            </a:r>
-          </a:p>
-          <a:p>
-            <a:pPr>
-              <a:spcAft>
-                <a:spcPts val="600"/>
-              </a:spcAft>
-            </a:pPr>
-            <a:r>
-              <a:rPr sz="1500">
-                <a:solidFill>
-                  <a:srgbClr val="22282E"/>
-                </a:solidFill>
-              </a:rPr>
-              <a:t>•  Extrae un archivo transferido por HTTP de un PCAP.</a:t>
-            </a:r>
-          </a:p>
-          <a:p>
-            <a:pPr>
-              <a:spcAft>
-                <a:spcPts val="600"/>
-              </a:spcAft>
-            </a:pPr>
-            <a:r>
-              <a:rPr sz="1500">
-                <a:solidFill>
-                  <a:srgbClr val="22282E"/>
-                </a:solidFill>
-              </a:rPr>
-              <a:t>•  Identifica un patrón de beaconing por su periodicidad.</a:t>
-            </a:r>
-          </a:p>
-          <a:p>
-            <a:pPr>
-              <a:spcAft>
-                <a:spcPts val="600"/>
-              </a:spcAft>
-            </a:pPr>
-            <a:r>
-              <a:rPr sz="1500">
-                <a:solidFill>
-                  <a:srgbClr val="22282E"/>
-                </a:solidFill>
-              </a:rPr>
-              <a:t>•  Detecta un túnel DNS por el volumen y forma de las consultas.</a:t>
-            </a:r>
-          </a:p>
-          <a:p>
-            <a:pPr>
-              <a:spcAft>
-                <a:spcPts val="600"/>
-              </a:spcAft>
-            </a:pPr>
-            <a:r>
-              <a:rPr sz="1500">
-                <a:solidFill>
-                  <a:srgbClr val="22282E"/>
-                </a:solidFill>
-              </a:rPr>
-              <a:t>•  Usa zeek-cut para listar las diez conversaciones más largas.</a:t>
-            </a:r>
-          </a:p>
-          <a:p>
-            <a:pPr>
-              <a:spcAft>
-                <a:spcPts val="600"/>
-              </a:spcAft>
-            </a:pPr>
-            <a:r>
-              <a:rPr sz="1500">
-                <a:solidFill>
-                  <a:srgbClr val="22282E"/>
-                </a:solidFill>
-              </a:rPr>
-              <a:t>•  Explica qué puedes y qué no puedes ver en tráfico TLS.</a:t>
+              <a:t>•  Un host contacta cada cinco minutos a un dominio recién observado y descarga respuestas de tamaño similar. Esa periodicidad permite priorizar la sesión, no declararla maliciosa. El analista verifica…</a:t>
+            </a:r>
+          </a:p>
+          <a:p>
+            <a:pPr>
+              <a:spcAft>
+                <a:spcPts val="600"/>
+              </a:spcAft>
+            </a:pPr>
+            <a:r>
+              <a:rPr sz="1500">
+                <a:solidFill>
+                  <a:srgbClr val="22282E"/>
+                </a:solidFill>
+              </a:rPr>
+              <a:t>•  La captura permite sostener que hubo comunicaciones y cuantificar los bytes transferidos. Si se recupera un objeto, su hash y estructura respaldan qué contenido atravesó el sensor. Para afirmar…</a:t>
             </a:r>
           </a:p>
         </p:txBody>
@@ -4733,7 +5409,7 @@
                   <a:srgbClr val="0B3D2E"/>
                 </a:solidFill>
               </a:rPr>
-              <a:t>📝 Reto verificable</a:t>
+              <a:t>✅ Criterio de dominio</a:t>
             </a:r>
           </a:p>
         </p:txBody>
@@ -4771,22 +5447,7 @@
                   <a:srgbClr val="22282E"/>
                 </a:solidFill>
               </a:rPr>
-              <a:t>•  Dado un PCAP que contiene un canal C2 con beaconing y una exfiltración de datos, identifica la IP del C2, el intervalo de beaconing y qué se exfiltró.</a:t>
-            </a:r>
-          </a:p>
-          <a:p>
-            <a:pPr>
-              <a:spcAft>
-                <a:spcPts val="600"/>
-              </a:spcAft>
-            </a:pPr>
-            <a:r>
-              <a:rPr sz="1500">
-                <a:solidFill>
-                  <a:srgbClr val="22282E"/>
-                </a:solidFill>
-              </a:rPr>
-              <a:t>•  Criterio de aceptación: reportas la IP/puerto del C2, el intervalo aproximado del beacon (con evidencia de la periodicidad), el método de exfiltración (DNS/HTTP) y, si es posible, el contenido o el tamaño de lo exfiltrado.</a:t>
+              <a:t>•  Dominas la clase cuando puedes seleccionar PCAP, flujo o logs Zeek según una pregunta; explicar la influencia del sensor, NAT, cifrado y pérdida; conservar trazabilidad de un objeto extraído; y…</a:t>
             </a:r>
           </a:p>
         </p:txBody>
